--- a/media/resources/files/Onduktar_BoluuJenilOrtoOor.pptx
+++ b/media/resources/files/Onduktar_BoluuJenilOrtoOor.pptx
@@ -7740,7 +7740,7 @@
                 <a:ea typeface="+mn-ea"/>
                 <a:cs typeface="+mn-cs"/>
               </a:rPr>
-              <a:t>Турдуу пикирлер учун ыраазычылык билдиребиз.</a:t>
+              <a:t>Түрдүү пикирлер үчүн ыраазычылык билдиребиз.</a:t>
             </a:r>
           </a:p>
           <a:p>

--- a/media/resources/files/Onduktar_BoluuJenilOrtoOor.pptx
+++ b/media/resources/files/Onduktar_BoluuJenilOrtoOor.pptx
@@ -2133,7 +2133,7 @@
             <a:pPr algn="ctr"/>
             <a:r>
               <a:rPr lang="en-GB" sz="2000" dirty="0"/>
-              <a:t>8 ÷ 0.2</a:t>
+              <a:t>8 ÷ 0,2</a:t>
             </a:r>
           </a:p>
         </p:txBody>
@@ -2210,7 +2210,7 @@
             <a:pPr algn="ctr"/>
             <a:r>
               <a:rPr lang="en-GB" sz="2000" dirty="0"/>
-              <a:t>9 ÷ 0.3</a:t>
+              <a:t>9 ÷ 0,3</a:t>
             </a:r>
           </a:p>
         </p:txBody>
@@ -2287,7 +2287,7 @@
             <a:pPr algn="ctr"/>
             <a:r>
               <a:rPr lang="en-GB" sz="2000" dirty="0"/>
-              <a:t>12 ÷ 0.5</a:t>
+              <a:t>12 ÷ 0,5</a:t>
             </a:r>
           </a:p>
         </p:txBody>
@@ -2364,7 +2364,7 @@
             <a:pPr algn="ctr"/>
             <a:r>
               <a:rPr lang="en-GB" sz="2000" dirty="0"/>
-              <a:t>7.8 ÷ 0.6</a:t>
+              <a:t>7,8 ÷ 0,6</a:t>
             </a:r>
           </a:p>
         </p:txBody>
@@ -2441,7 +2441,7 @@
             <a:pPr algn="ctr"/>
             <a:r>
               <a:rPr lang="en-GB" sz="2000" dirty="0"/>
-              <a:t>0.8 ÷ 2</a:t>
+              <a:t>0,8 ÷ 2</a:t>
             </a:r>
           </a:p>
         </p:txBody>
@@ -2555,7 +2555,7 @@
             <a:pPr algn="ctr"/>
             <a:r>
               <a:rPr lang="en-GB" sz="2000" dirty="0"/>
-              <a:t>16 ÷ 0.2</a:t>
+              <a:t>16 ÷ 0,2</a:t>
             </a:r>
           </a:p>
         </p:txBody>
@@ -2632,7 +2632,7 @@
             <a:pPr algn="ctr"/>
             <a:r>
               <a:rPr lang="en-GB" sz="2000" dirty="0"/>
-              <a:t>6 ÷ 1.2</a:t>
+              <a:t>6 ÷ 1,2</a:t>
             </a:r>
           </a:p>
         </p:txBody>
@@ -2709,7 +2709,7 @@
             <a:pPr algn="ctr"/>
             <a:r>
               <a:rPr lang="en-GB" sz="2000" dirty="0"/>
-              <a:t>15 ÷ 1.5</a:t>
+              <a:t>15 ÷ 1,5</a:t>
             </a:r>
           </a:p>
         </p:txBody>
@@ -2786,7 +2786,7 @@
             <a:pPr algn="ctr"/>
             <a:r>
               <a:rPr lang="en-GB" sz="2000" dirty="0"/>
-              <a:t>9.1 ÷ 1.3</a:t>
+              <a:t>9,1 ÷ 1,3</a:t>
             </a:r>
           </a:p>
         </p:txBody>
@@ -2863,7 +2863,7 @@
             <a:pPr algn="ctr"/>
             <a:r>
               <a:rPr lang="en-GB" sz="2000" dirty="0"/>
-              <a:t>9.6 ÷ 0.4</a:t>
+              <a:t>9,6 ÷ 0,4</a:t>
             </a:r>
           </a:p>
         </p:txBody>
@@ -2940,7 +2940,7 @@
             <a:pPr algn="ctr"/>
             <a:r>
               <a:rPr lang="en-GB" sz="2000" dirty="0"/>
-              <a:t>51.1 ÷ 0.7</a:t>
+              <a:t>51,1 ÷ 0,7</a:t>
             </a:r>
           </a:p>
         </p:txBody>
@@ -3054,7 +3054,7 @@
             <a:pPr algn="ctr"/>
             <a:r>
               <a:rPr lang="en-GB" sz="2000" dirty="0"/>
-              <a:t>16.8 ÷ 0.6</a:t>
+              <a:t>16,8 ÷ 0,6</a:t>
             </a:r>
           </a:p>
         </p:txBody>
@@ -3131,7 +3131,7 @@
             <a:pPr algn="ctr"/>
             <a:r>
               <a:rPr lang="en-GB" sz="2000" dirty="0"/>
-              <a:t>2 ÷ 0.04</a:t>
+              <a:t>2 ÷ 0,04</a:t>
             </a:r>
           </a:p>
         </p:txBody>
@@ -3208,7 +3208,7 @@
             <a:pPr algn="ctr"/>
             <a:r>
               <a:rPr lang="en-GB" sz="2000" dirty="0"/>
-              <a:t>9 ÷ 0.25</a:t>
+              <a:t>9 ÷ 0,25</a:t>
             </a:r>
           </a:p>
         </p:txBody>
@@ -3285,7 +3285,7 @@
             <a:pPr algn="ctr"/>
             <a:r>
               <a:rPr lang="en-GB" sz="2000" dirty="0"/>
-              <a:t>86.4 ÷ 0.8</a:t>
+              <a:t>86,4 ÷ 0,8</a:t>
             </a:r>
           </a:p>
         </p:txBody>
@@ -3362,7 +3362,7 @@
             <a:pPr algn="ctr"/>
             <a:r>
               <a:rPr lang="en-GB" sz="2000" dirty="0"/>
-              <a:t>9.4 ÷ 0.4</a:t>
+              <a:t>9,4 ÷ 0,4</a:t>
             </a:r>
           </a:p>
         </p:txBody>
@@ -3439,7 +3439,7 @@
             <a:pPr algn="ctr"/>
             <a:r>
               <a:rPr lang="en-GB" sz="2000" dirty="0"/>
-              <a:t>58.2 ÷ 1.2</a:t>
+              <a:t>58,2 ÷ 1,2</a:t>
             </a:r>
           </a:p>
         </p:txBody>
@@ -4145,7 +4145,7 @@
             <a:pPr algn="ctr"/>
             <a:r>
               <a:rPr lang="en-GB" sz="2000" dirty="0"/>
-              <a:t>8 ÷ 0.2</a:t>
+              <a:t>8 ÷ 0,2</a:t>
             </a:r>
           </a:p>
         </p:txBody>
@@ -4264,7 +4264,7 @@
             <a:pPr algn="ctr"/>
             <a:r>
               <a:rPr lang="en-GB" sz="2000" dirty="0"/>
-              <a:t>9 ÷ 0.3</a:t>
+              <a:t>9 ÷ 0,3</a:t>
             </a:r>
           </a:p>
         </p:txBody>
@@ -4383,7 +4383,7 @@
             <a:pPr algn="ctr"/>
             <a:r>
               <a:rPr lang="en-GB" sz="2000" dirty="0"/>
-              <a:t>12 ÷ 0.5</a:t>
+              <a:t>12 ÷ 0,5</a:t>
             </a:r>
           </a:p>
         </p:txBody>
@@ -4502,7 +4502,7 @@
             <a:pPr algn="ctr"/>
             <a:r>
               <a:rPr lang="en-GB" sz="2000" dirty="0"/>
-              <a:t>7.8 ÷ 0.6</a:t>
+              <a:t>7,8 ÷ 0,6</a:t>
             </a:r>
           </a:p>
         </p:txBody>
@@ -4585,7 +4585,7 @@
           <a:p>
             <a:r>
               <a:rPr lang="en-GB" sz="2000" dirty="0"/>
-              <a:t>= 0.4</a:t>
+              <a:t>= 0,4</a:t>
             </a:r>
           </a:p>
         </p:txBody>
@@ -4621,7 +4621,7 @@
             <a:pPr algn="ctr"/>
             <a:r>
               <a:rPr lang="en-GB" sz="2000" dirty="0"/>
-              <a:t>0.8 ÷ 2</a:t>
+              <a:t>0,8 ÷ 2</a:t>
             </a:r>
           </a:p>
         </p:txBody>
@@ -4777,7 +4777,7 @@
             <a:pPr algn="ctr"/>
             <a:r>
               <a:rPr lang="en-GB" sz="2000" dirty="0"/>
-              <a:t>16 ÷ 0.2</a:t>
+              <a:t>16 ÷ 0,2</a:t>
             </a:r>
           </a:p>
         </p:txBody>
@@ -4896,7 +4896,7 @@
             <a:pPr algn="ctr"/>
             <a:r>
               <a:rPr lang="en-GB" sz="2000" dirty="0"/>
-              <a:t>6 ÷ 1.2</a:t>
+              <a:t>6 ÷ 1,2</a:t>
             </a:r>
           </a:p>
         </p:txBody>
@@ -5015,7 +5015,7 @@
             <a:pPr algn="ctr"/>
             <a:r>
               <a:rPr lang="en-GB" sz="2000" dirty="0"/>
-              <a:t>15 ÷ 1.5</a:t>
+              <a:t>15 ÷ 1,5</a:t>
             </a:r>
           </a:p>
         </p:txBody>
@@ -5134,7 +5134,7 @@
             <a:pPr algn="ctr"/>
             <a:r>
               <a:rPr lang="en-GB" sz="2000" dirty="0"/>
-              <a:t>9.1 ÷ 1.3</a:t>
+              <a:t>9,1 ÷ 1,3</a:t>
             </a:r>
           </a:p>
         </p:txBody>
@@ -5253,7 +5253,7 @@
             <a:pPr algn="ctr"/>
             <a:r>
               <a:rPr lang="en-GB" sz="2000" dirty="0"/>
-              <a:t>9.6 ÷ 0.4</a:t>
+              <a:t>9,6 ÷ 0,4</a:t>
             </a:r>
           </a:p>
         </p:txBody>
@@ -5372,7 +5372,7 @@
             <a:pPr algn="ctr"/>
             <a:r>
               <a:rPr lang="en-GB" sz="2000" dirty="0"/>
-              <a:t>51.1 ÷ 0.7</a:t>
+              <a:t>51,1 ÷ 0,7</a:t>
             </a:r>
           </a:p>
         </p:txBody>
@@ -5528,7 +5528,7 @@
             <a:pPr algn="ctr"/>
             <a:r>
               <a:rPr lang="en-GB" sz="2000" dirty="0"/>
-              <a:t>16.8 ÷ 0.6</a:t>
+              <a:t>16,8 ÷ 0,6</a:t>
             </a:r>
           </a:p>
         </p:txBody>
@@ -5647,7 +5647,7 @@
             <a:pPr algn="ctr"/>
             <a:r>
               <a:rPr lang="en-GB" sz="2000" dirty="0"/>
-              <a:t>2 ÷ 0.04</a:t>
+              <a:t>2 ÷ 0,04</a:t>
             </a:r>
           </a:p>
         </p:txBody>
@@ -5766,7 +5766,7 @@
             <a:pPr algn="ctr"/>
             <a:r>
               <a:rPr lang="en-GB" sz="2000" dirty="0"/>
-              <a:t>9 ÷ 0.25</a:t>
+              <a:t>9 ÷ 0,25</a:t>
             </a:r>
           </a:p>
         </p:txBody>
@@ -5885,7 +5885,7 @@
             <a:pPr algn="ctr"/>
             <a:r>
               <a:rPr lang="en-GB" sz="2000" dirty="0"/>
-              <a:t>86.4 ÷ 0.8</a:t>
+              <a:t>86,4 ÷ 0,8</a:t>
             </a:r>
           </a:p>
         </p:txBody>
@@ -5968,7 +5968,7 @@
           <a:p>
             <a:r>
               <a:rPr lang="en-GB" sz="2000" dirty="0"/>
-              <a:t>= 23.5</a:t>
+              <a:t>= 23,5</a:t>
             </a:r>
           </a:p>
         </p:txBody>
@@ -6004,7 +6004,7 @@
             <a:pPr algn="ctr"/>
             <a:r>
               <a:rPr lang="en-GB" sz="2000" dirty="0"/>
-              <a:t>9.4 ÷ 0.4</a:t>
+              <a:t>9,4 ÷ 0,4</a:t>
             </a:r>
           </a:p>
         </p:txBody>
@@ -6087,7 +6087,7 @@
           <a:p>
             <a:r>
               <a:rPr lang="en-GB" sz="2000" dirty="0"/>
-              <a:t>= 48.5</a:t>
+              <a:t>= 48,5</a:t>
             </a:r>
           </a:p>
         </p:txBody>
@@ -6123,7 +6123,7 @@
             <a:pPr algn="ctr"/>
             <a:r>
               <a:rPr lang="en-GB" sz="2000" dirty="0"/>
-              <a:t>58.2 ÷ 1.2</a:t>
+              <a:t>58,2 ÷ 1,2</a:t>
             </a:r>
           </a:p>
         </p:txBody>
